--- a/docs/SECR_Database_Overview.pptx
+++ b/docs/SECR_Database_Overview.pptx
@@ -8455,7 +8455,7 @@
                 </a:solidFill>
                 <a:latin typeface="Calibri"/>
               </a:rPr>
-              <a:t>Auto sequence numbering from the database, replacing hardcoded _1000 (~half day)</a:t>
+              <a:t>Sequence ranges reserved per program — _1000 for RU, _2000 for DT — auto-assigned from the database, replacing the hardcoded _1000</a:t>
             </a:r>
           </a:p>
         </p:txBody>
